--- a/slides/231A010722- SLIEDE TRINH BAY DE TAI 35.pptx
+++ b/slides/231A010722- SLIEDE TRINH BAY DE TAI 35.pptx
@@ -118,6 +118,11 @@
       </a:defRPr>
     </a:lvl9pPr>
   </p:defaultTextStyle>
+  <p:extLst>
+    <p:ext uri="{EFAFB233-063F-42B5-8137-9DF3F51BA10A}">
+      <p15:sldGuideLst xmlns:p15="http://schemas.microsoft.com/office/powerpoint/2012/main"/>
+    </p:ext>
+  </p:extLst>
 </p:presentation>
 </file>
 
@@ -1988,7 +1993,7 @@
         </p:nvSpPr>
         <p:spPr>
           <a:xfrm>
-            <a:off x="838200" y="1504950"/>
+            <a:off x="795184" y="1197999"/>
             <a:ext cx="5905500" cy="1638300"/>
           </a:xfrm>
           <a:prstGeom prst="rect">
@@ -2012,7 +2017,7 @@
               </a:defRPr>
             </a:pPr>
             <a:r>
-              <a:rPr sz="3225" b="1" i="0">
+              <a:rPr sz="3225" b="1" i="0" dirty="0">
                 <a:solidFill>
                   <a:srgbClr val="FFFFFF"/>
                 </a:solidFill>
@@ -2029,7 +2034,7 @@
               </a:defRPr>
             </a:pPr>
             <a:r>
-              <a:rPr sz="3225" b="1" i="0">
+              <a:rPr sz="3225" b="1" i="0" dirty="0">
                 <a:solidFill>
                   <a:srgbClr val="FFFFFF"/>
                 </a:solidFill>
@@ -2055,7 +2060,7 @@
         </p:nvSpPr>
         <p:spPr>
           <a:xfrm>
-            <a:off x="838200" y="3143250"/>
+            <a:off x="838200" y="2579124"/>
             <a:ext cx="5143500" cy="514350"/>
           </a:xfrm>
           <a:prstGeom prst="rect">
@@ -2079,7 +2084,7 @@
               </a:defRPr>
             </a:pPr>
             <a:r>
-              <a:rPr sz="2925" b="1" i="0">
+              <a:rPr sz="2925" b="1" i="0" dirty="0">
                 <a:solidFill>
                   <a:srgbClr val="18C7B3"/>
                 </a:solidFill>
@@ -2091,114 +2096,22 @@
       </p:sp>
       <p:sp>
         <p:nvSpPr>
-          <p:cNvPr id="8" name="Rectangle 7">
-            <a:extLst>
-              <a:ext uri="{FF2B5EF4-FFF2-40B4-BE49-F238E27FC236}">
-                <a16:creationId xmlns:a16="http://schemas.microsoft.com/office/drawing/2014/main" id="{A2EEC314-DEFD-4DB3-9CCE-B22A06EF5D87}"/>
-              </a:ext>
-            </a:extLst>
-          </p:cNvPr>
-          <p:cNvSpPr>
-            <a:spLocks noGrp="1"/>
-          </p:cNvSpPr>
-          <p:nvPr/>
-        </p:nvSpPr>
-        <p:spPr>
-          <a:xfrm>
-            <a:off x="838200" y="3905250"/>
-            <a:ext cx="5334000" cy="552450"/>
-          </a:xfrm>
-          <a:prstGeom prst="rect">
-            <a:avLst/>
-          </a:prstGeom>
-          <a:noFill/>
-          <a:ln w="0">
-            <a:noFill/>
-            <a:prstDash val="solid"/>
-          </a:ln>
-        </p:spPr>
-        <p:txBody>
-          <a:bodyPr anchor="t"/>
-          <a:lstStyle/>
-          <a:p>
-            <a:pPr algn="l">
-              <a:defRPr sz="1350" b="0" i="0">
-                <a:solidFill>
-                  <a:srgbClr val="D4E9EE"/>
-                </a:solidFill>
-              </a:defRPr>
-            </a:pPr>
-            <a:r>
-              <a:rPr sz="1350" b="0" i="0">
-                <a:solidFill>
-                  <a:srgbClr val="D4E9EE"/>
-                </a:solidFill>
-              </a:rPr>
-              <a:t>Nhận diện tài sản  •  Đánh giá rủi ro  •  Kiểm soát theo ưu tiên</a:t>
-            </a:r>
-          </a:p>
-        </p:txBody>
-      </p:sp>
-      <p:sp>
-        <p:nvSpPr>
-          <p:cNvPr id="9" name="Rectangle: Rounded Corners 8">
-            <a:extLst>
-              <a:ext uri="{FF2B5EF4-FFF2-40B4-BE49-F238E27FC236}">
-                <a16:creationId xmlns:a16="http://schemas.microsoft.com/office/drawing/2014/main" id="{9C88FF10-5B60-4D43-AF52-6F4D081D7930}"/>
-              </a:ext>
-            </a:extLst>
-          </p:cNvPr>
-          <p:cNvSpPr>
-            <a:spLocks noGrp="1"/>
-          </p:cNvSpPr>
-          <p:nvPr/>
-        </p:nvSpPr>
-        <p:spPr>
-          <a:xfrm>
-            <a:off x="838200" y="4933950"/>
-            <a:ext cx="4229100" cy="952500"/>
-          </a:xfrm>
-          <a:prstGeom prst="roundRect">
-            <a:avLst>
-              <a:gd name="adj" fmla="val 12000"/>
-            </a:avLst>
-          </a:prstGeom>
-          <a:solidFill>
-            <a:srgbClr val="0A2A40"/>
-          </a:solidFill>
-          <a:ln w="9525">
-            <a:solidFill>
-              <a:srgbClr val="1C526B"/>
-            </a:solidFill>
-            <a:prstDash val="solid"/>
-          </a:ln>
-        </p:spPr>
-        <p:txBody>
-          <a:bodyPr/>
-          <a:lstStyle/>
-          <a:p>
-            <a:endParaRPr lang="en-US"/>
-          </a:p>
-        </p:txBody>
-      </p:sp>
-      <p:sp>
-        <p:nvSpPr>
-          <p:cNvPr id="10" name="Rectangle 9">
-            <a:extLst>
-              <a:ext uri="{FF2B5EF4-FFF2-40B4-BE49-F238E27FC236}">
-                <a16:creationId xmlns:a16="http://schemas.microsoft.com/office/drawing/2014/main" id="{D8D3AEE5-6DEA-45DD-B20C-656BB856B733}"/>
-              </a:ext>
-            </a:extLst>
-          </p:cNvPr>
-          <p:cNvSpPr>
-            <a:spLocks noGrp="1"/>
-          </p:cNvSpPr>
-          <p:nvPr/>
-        </p:nvSpPr>
-        <p:spPr>
-          <a:xfrm>
-            <a:off x="1066800" y="5143500"/>
-            <a:ext cx="952500" cy="190500"/>
+          <p:cNvPr id="12" name="Rectangle 11">
+            <a:extLst>
+              <a:ext uri="{FF2B5EF4-FFF2-40B4-BE49-F238E27FC236}">
+                <a16:creationId xmlns:a16="http://schemas.microsoft.com/office/drawing/2014/main" id="{D294090D-8A85-44B2-8F3A-B4817DCF1605}"/>
+              </a:ext>
+            </a:extLst>
+          </p:cNvPr>
+          <p:cNvSpPr>
+            <a:spLocks noGrp="1"/>
+          </p:cNvSpPr>
+          <p:nvPr/>
+        </p:nvSpPr>
+        <p:spPr>
+          <a:xfrm>
+            <a:off x="1066800" y="5619750"/>
+            <a:ext cx="3429000" cy="171450"/>
           </a:xfrm>
           <a:prstGeom prst="rect">
             <a:avLst/>
@@ -2216,121 +2129,578 @@
             <a:pPr algn="l">
               <a:defRPr sz="825" b="1" i="0">
                 <a:solidFill>
-                  <a:srgbClr val="7FB4C3"/>
-                </a:solidFill>
-              </a:defRPr>
-            </a:pPr>
-            <a:r>
-              <a:rPr sz="825" b="1" i="0">
-                <a:solidFill>
-                  <a:srgbClr val="7FB4C3"/>
-                </a:solidFill>
-              </a:rPr>
-              <a:t>Sinh viên</a:t>
-            </a:r>
-          </a:p>
-        </p:txBody>
-      </p:sp>
-      <p:sp>
-        <p:nvSpPr>
-          <p:cNvPr id="11" name="Rectangle 10">
-            <a:extLst>
-              <a:ext uri="{FF2B5EF4-FFF2-40B4-BE49-F238E27FC236}">
-                <a16:creationId xmlns:a16="http://schemas.microsoft.com/office/drawing/2014/main" id="{1E274104-C2F0-47C6-A10B-4998D124213C}"/>
-              </a:ext>
-            </a:extLst>
-          </p:cNvPr>
-          <p:cNvSpPr>
-            <a:spLocks noGrp="1"/>
-          </p:cNvSpPr>
-          <p:nvPr/>
-        </p:nvSpPr>
-        <p:spPr>
-          <a:xfrm>
-            <a:off x="1066800" y="5353050"/>
-            <a:ext cx="2286000" cy="228600"/>
-          </a:xfrm>
-          <a:prstGeom prst="rect">
-            <a:avLst/>
-          </a:prstGeom>
-          <a:noFill/>
-          <a:ln w="0">
-            <a:noFill/>
-            <a:prstDash val="solid"/>
-          </a:ln>
-        </p:spPr>
-        <p:txBody>
-          <a:bodyPr anchor="t"/>
-          <a:lstStyle/>
-          <a:p>
-            <a:pPr algn="l">
-              <a:defRPr sz="1275" b="1" i="0">
-                <a:solidFill>
-                  <a:srgbClr val="FFFFFF"/>
-                </a:solidFill>
-              </a:defRPr>
-            </a:pPr>
-            <a:r>
-              <a:rPr sz="1275" b="1" i="0">
-                <a:solidFill>
-                  <a:srgbClr val="FFFFFF"/>
-                </a:solidFill>
-              </a:rPr>
-              <a:t>VÕ NGUYỄN DUYÊN</a:t>
-            </a:r>
-          </a:p>
-        </p:txBody>
-      </p:sp>
-      <p:sp>
-        <p:nvSpPr>
-          <p:cNvPr id="12" name="Rectangle 11">
-            <a:extLst>
-              <a:ext uri="{FF2B5EF4-FFF2-40B4-BE49-F238E27FC236}">
-                <a16:creationId xmlns:a16="http://schemas.microsoft.com/office/drawing/2014/main" id="{D294090D-8A85-44B2-8F3A-B4817DCF1605}"/>
-              </a:ext>
-            </a:extLst>
-          </p:cNvPr>
-          <p:cNvSpPr>
-            <a:spLocks noGrp="1"/>
-          </p:cNvSpPr>
-          <p:nvPr/>
-        </p:nvSpPr>
-        <p:spPr>
-          <a:xfrm>
-            <a:off x="1066800" y="5619750"/>
-            <a:ext cx="3429000" cy="171450"/>
-          </a:xfrm>
-          <a:prstGeom prst="rect">
-            <a:avLst/>
-          </a:prstGeom>
-          <a:noFill/>
-          <a:ln w="0">
-            <a:noFill/>
-            <a:prstDash val="solid"/>
-          </a:ln>
-        </p:spPr>
-        <p:txBody>
-          <a:bodyPr anchor="t"/>
-          <a:lstStyle/>
-          <a:p>
-            <a:pPr algn="l">
-              <a:defRPr sz="825" b="1" i="0">
-                <a:solidFill>
                   <a:srgbClr val="59DCE0"/>
                 </a:solidFill>
               </a:defRPr>
             </a:pPr>
-            <a:r>
-              <a:rPr sz="825" b="1" i="0">
-                <a:solidFill>
-                  <a:srgbClr val="59DCE0"/>
-                </a:solidFill>
-              </a:rPr>
-              <a:t>MSSV 231A010722  •  GV: HỒ NHỰT MINH</a:t>
-            </a:r>
-          </a:p>
-        </p:txBody>
-      </p:sp>
+            <a:endParaRPr sz="825" b="1" i="0" dirty="0">
+              <a:solidFill>
+                <a:srgbClr val="59DCE0"/>
+              </a:solidFill>
+            </a:endParaRPr>
+          </a:p>
+        </p:txBody>
+      </p:sp>
+      <p:graphicFrame>
+        <p:nvGraphicFramePr>
+          <p:cNvPr id="14" name="Table 13">
+            <a:extLst>
+              <a:ext uri="{FF2B5EF4-FFF2-40B4-BE49-F238E27FC236}">
+                <a16:creationId xmlns:a16="http://schemas.microsoft.com/office/drawing/2014/main" id="{9C0C383F-140E-1DF2-4DE9-3ADA45C75913}"/>
+              </a:ext>
+            </a:extLst>
+          </p:cNvPr>
+          <p:cNvGraphicFramePr>
+            <a:graphicFrameLocks noGrp="1"/>
+          </p:cNvGraphicFramePr>
+          <p:nvPr>
+            <p:extLst>
+              <p:ext uri="{D42A27DB-BD31-4B8C-83A1-F6EECF244321}">
+                <p14:modId xmlns:p14="http://schemas.microsoft.com/office/powerpoint/2010/main" val="565650786"/>
+              </p:ext>
+            </p:extLst>
+          </p:nvPr>
+        </p:nvGraphicFramePr>
+        <p:xfrm>
+          <a:off x="721934" y="3764527"/>
+          <a:ext cx="5374066" cy="2294258"/>
+        </p:xfrm>
+        <a:graphic>
+          <a:graphicData uri="http://schemas.openxmlformats.org/drawingml/2006/table">
+            <a:tbl>
+              <a:tblPr firstRow="1" firstCol="1" bandRow="1">
+                <a:tableStyleId>{5C22544A-7EE6-4342-B048-85BDC9FD1C3A}</a:tableStyleId>
+              </a:tblPr>
+              <a:tblGrid>
+                <a:gridCol w="1449737">
+                  <a:extLst>
+                    <a:ext uri="{9D8B030D-6E8A-4147-A177-3AD203B41FA5}">
+                      <a16:colId xmlns:a16="http://schemas.microsoft.com/office/drawing/2014/main" val="1050563225"/>
+                    </a:ext>
+                  </a:extLst>
+                </a:gridCol>
+                <a:gridCol w="3924329">
+                  <a:extLst>
+                    <a:ext uri="{9D8B030D-6E8A-4147-A177-3AD203B41FA5}">
+                      <a16:colId xmlns:a16="http://schemas.microsoft.com/office/drawing/2014/main" val="995884200"/>
+                    </a:ext>
+                  </a:extLst>
+                </a:gridCol>
+              </a:tblGrid>
+              <a:tr h="0">
+                <a:tc>
+                  <a:txBody>
+                    <a:bodyPr/>
+                    <a:lstStyle/>
+                    <a:p>
+                      <a:pPr marL="6350" marR="12065" indent="-6350" algn="just">
+                        <a:lnSpc>
+                          <a:spcPct val="115000"/>
+                        </a:lnSpc>
+                        <a:spcAft>
+                          <a:spcPts val="870"/>
+                        </a:spcAft>
+                        <a:buNone/>
+                      </a:pPr>
+                      <a:r>
+                        <a:rPr lang="en-US" sz="1050" kern="0">
+                          <a:effectLst/>
+                        </a:rPr>
+                        <a:t>Mã học phần</a:t>
+                      </a:r>
+                      <a:endParaRPr lang="en-US" sz="1200" kern="100">
+                        <a:solidFill>
+                          <a:srgbClr val="000000"/>
+                        </a:solidFill>
+                        <a:effectLst/>
+                        <a:latin typeface="Times New Roman" panose="02020603050405020304" pitchFamily="18" charset="0"/>
+                        <a:ea typeface="Times New Roman" panose="02020603050405020304" pitchFamily="18" charset="0"/>
+                      </a:endParaRPr>
+                    </a:p>
+                  </a:txBody>
+                  <a:tcPr marL="76200" marR="76200" marT="50800" marB="50800" anchor="ctr"/>
+                </a:tc>
+                <a:tc>
+                  <a:txBody>
+                    <a:bodyPr/>
+                    <a:lstStyle/>
+                    <a:p>
+                      <a:pPr marL="6350" marR="12065" indent="-6350" algn="just">
+                        <a:lnSpc>
+                          <a:spcPct val="115000"/>
+                        </a:lnSpc>
+                        <a:spcAft>
+                          <a:spcPts val="870"/>
+                        </a:spcAft>
+                        <a:buNone/>
+                      </a:pPr>
+                      <a:r>
+                        <a:rPr lang="en-US" sz="1050" kern="0">
+                          <a:effectLst/>
+                        </a:rPr>
+                        <a:t>INT4410</a:t>
+                      </a:r>
+                      <a:endParaRPr lang="en-US" sz="1200" kern="100">
+                        <a:solidFill>
+                          <a:srgbClr val="000000"/>
+                        </a:solidFill>
+                        <a:effectLst/>
+                        <a:latin typeface="Times New Roman" panose="02020603050405020304" pitchFamily="18" charset="0"/>
+                        <a:ea typeface="Times New Roman" panose="02020603050405020304" pitchFamily="18" charset="0"/>
+                      </a:endParaRPr>
+                    </a:p>
+                  </a:txBody>
+                  <a:tcPr marL="76200" marR="76200" marT="50800" marB="50800" anchor="ctr"/>
+                </a:tc>
+                <a:extLst>
+                  <a:ext uri="{0D108BD9-81ED-4DB2-BD59-A6C34878D82A}">
+                    <a16:rowId xmlns:a16="http://schemas.microsoft.com/office/drawing/2014/main" val="2454468982"/>
+                  </a:ext>
+                </a:extLst>
+              </a:tr>
+              <a:tr h="0">
+                <a:tc>
+                  <a:txBody>
+                    <a:bodyPr/>
+                    <a:lstStyle/>
+                    <a:p>
+                      <a:pPr marL="6350" marR="12065" indent="-6350" algn="just">
+                        <a:lnSpc>
+                          <a:spcPct val="115000"/>
+                        </a:lnSpc>
+                        <a:spcAft>
+                          <a:spcPts val="870"/>
+                        </a:spcAft>
+                        <a:buNone/>
+                      </a:pPr>
+                      <a:r>
+                        <a:rPr lang="en-US" sz="1050" kern="0">
+                          <a:effectLst/>
+                        </a:rPr>
+                        <a:t>Lớp học phần</a:t>
+                      </a:r>
+                      <a:endParaRPr lang="en-US" sz="1200" kern="100">
+                        <a:solidFill>
+                          <a:srgbClr val="000000"/>
+                        </a:solidFill>
+                        <a:effectLst/>
+                        <a:latin typeface="Times New Roman" panose="02020603050405020304" pitchFamily="18" charset="0"/>
+                        <a:ea typeface="Times New Roman" panose="02020603050405020304" pitchFamily="18" charset="0"/>
+                      </a:endParaRPr>
+                    </a:p>
+                  </a:txBody>
+                  <a:tcPr marL="76200" marR="76200" marT="50800" marB="50800" anchor="ctr"/>
+                </a:tc>
+                <a:tc>
+                  <a:txBody>
+                    <a:bodyPr/>
+                    <a:lstStyle/>
+                    <a:p>
+                      <a:pPr marL="6350" marR="12065" indent="-6350" algn="just">
+                        <a:lnSpc>
+                          <a:spcPct val="115000"/>
+                        </a:lnSpc>
+                        <a:spcAft>
+                          <a:spcPts val="870"/>
+                        </a:spcAft>
+                        <a:buNone/>
+                      </a:pPr>
+                      <a:r>
+                        <a:rPr lang="en-US" sz="1100" kern="0" dirty="0">
+                          <a:effectLst/>
+                        </a:rPr>
+                        <a:t> </a:t>
+                      </a:r>
+                      <a:endParaRPr lang="en-US" sz="1200" kern="100" dirty="0">
+                        <a:solidFill>
+                          <a:srgbClr val="000000"/>
+                        </a:solidFill>
+                        <a:effectLst/>
+                        <a:latin typeface="Times New Roman" panose="02020603050405020304" pitchFamily="18" charset="0"/>
+                        <a:ea typeface="Times New Roman" panose="02020603050405020304" pitchFamily="18" charset="0"/>
+                      </a:endParaRPr>
+                    </a:p>
+                  </a:txBody>
+                  <a:tcPr marL="76200" marR="76200" marT="50800" marB="50800" anchor="ctr"/>
+                </a:tc>
+                <a:extLst>
+                  <a:ext uri="{0D108BD9-81ED-4DB2-BD59-A6C34878D82A}">
+                    <a16:rowId xmlns:a16="http://schemas.microsoft.com/office/drawing/2014/main" val="3412483534"/>
+                  </a:ext>
+                </a:extLst>
+              </a:tr>
+              <a:tr h="0">
+                <a:tc>
+                  <a:txBody>
+                    <a:bodyPr/>
+                    <a:lstStyle/>
+                    <a:p>
+                      <a:pPr marL="6350" marR="12065" indent="-6350" algn="just">
+                        <a:lnSpc>
+                          <a:spcPct val="115000"/>
+                        </a:lnSpc>
+                        <a:spcAft>
+                          <a:spcPts val="870"/>
+                        </a:spcAft>
+                        <a:buNone/>
+                      </a:pPr>
+                      <a:r>
+                        <a:rPr lang="en-US" sz="1050" kern="0">
+                          <a:effectLst/>
+                        </a:rPr>
+                        <a:t>Giảng viên hướng dẫn</a:t>
+                      </a:r>
+                      <a:endParaRPr lang="en-US" sz="1200" kern="100">
+                        <a:solidFill>
+                          <a:srgbClr val="000000"/>
+                        </a:solidFill>
+                        <a:effectLst/>
+                        <a:latin typeface="Times New Roman" panose="02020603050405020304" pitchFamily="18" charset="0"/>
+                        <a:ea typeface="Times New Roman" panose="02020603050405020304" pitchFamily="18" charset="0"/>
+                      </a:endParaRPr>
+                    </a:p>
+                  </a:txBody>
+                  <a:tcPr marL="76200" marR="76200" marT="50800" marB="50800" anchor="ctr"/>
+                </a:tc>
+                <a:tc>
+                  <a:txBody>
+                    <a:bodyPr/>
+                    <a:lstStyle/>
+                    <a:p>
+                      <a:pPr marL="6350" marR="12065" indent="-6350" algn="just">
+                        <a:lnSpc>
+                          <a:spcPct val="115000"/>
+                        </a:lnSpc>
+                        <a:spcAft>
+                          <a:spcPts val="870"/>
+                        </a:spcAft>
+                        <a:buNone/>
+                      </a:pPr>
+                      <a:r>
+                        <a:rPr lang="en-US" sz="1050" kern="0">
+                          <a:effectLst/>
+                        </a:rPr>
+                        <a:t>Hồ Nhựt Minh</a:t>
+                      </a:r>
+                      <a:endParaRPr lang="en-US" sz="1200" kern="100">
+                        <a:solidFill>
+                          <a:srgbClr val="000000"/>
+                        </a:solidFill>
+                        <a:effectLst/>
+                        <a:latin typeface="Times New Roman" panose="02020603050405020304" pitchFamily="18" charset="0"/>
+                        <a:ea typeface="Times New Roman" panose="02020603050405020304" pitchFamily="18" charset="0"/>
+                      </a:endParaRPr>
+                    </a:p>
+                  </a:txBody>
+                  <a:tcPr marL="76200" marR="76200" marT="50800" marB="50800" anchor="ctr"/>
+                </a:tc>
+                <a:extLst>
+                  <a:ext uri="{0D108BD9-81ED-4DB2-BD59-A6C34878D82A}">
+                    <a16:rowId xmlns:a16="http://schemas.microsoft.com/office/drawing/2014/main" val="2476912540"/>
+                  </a:ext>
+                </a:extLst>
+              </a:tr>
+              <a:tr h="0">
+                <a:tc>
+                  <a:txBody>
+                    <a:bodyPr/>
+                    <a:lstStyle/>
+                    <a:p>
+                      <a:pPr marL="6350" marR="12065" indent="-6350" algn="just">
+                        <a:lnSpc>
+                          <a:spcPct val="115000"/>
+                        </a:lnSpc>
+                        <a:spcAft>
+                          <a:spcPts val="870"/>
+                        </a:spcAft>
+                        <a:buNone/>
+                      </a:pPr>
+                      <a:r>
+                        <a:rPr lang="en-US" sz="1050" kern="0">
+                          <a:effectLst/>
+                        </a:rPr>
+                        <a:t>Sinh viên/Nhóm</a:t>
+                      </a:r>
+                      <a:endParaRPr lang="en-US" sz="1200" kern="100">
+                        <a:solidFill>
+                          <a:srgbClr val="000000"/>
+                        </a:solidFill>
+                        <a:effectLst/>
+                        <a:latin typeface="Times New Roman" panose="02020603050405020304" pitchFamily="18" charset="0"/>
+                        <a:ea typeface="Times New Roman" panose="02020603050405020304" pitchFamily="18" charset="0"/>
+                      </a:endParaRPr>
+                    </a:p>
+                  </a:txBody>
+                  <a:tcPr marL="76200" marR="76200" marT="50800" marB="50800" anchor="ctr"/>
+                </a:tc>
+                <a:tc>
+                  <a:txBody>
+                    <a:bodyPr/>
+                    <a:lstStyle/>
+                    <a:p>
+                      <a:pPr marL="0" marR="12065" indent="0" algn="just">
+                        <a:lnSpc>
+                          <a:spcPct val="115000"/>
+                        </a:lnSpc>
+                        <a:spcAft>
+                          <a:spcPts val="870"/>
+                        </a:spcAft>
+                        <a:buNone/>
+                      </a:pPr>
+                      <a:r>
+                        <a:rPr lang="en-US" sz="1050" kern="0">
+                          <a:effectLst/>
+                        </a:rPr>
+                        <a:t> Võ Nguyễn Duyên</a:t>
+                      </a:r>
+                      <a:endParaRPr lang="en-US" sz="1200" kern="100">
+                        <a:solidFill>
+                          <a:srgbClr val="000000"/>
+                        </a:solidFill>
+                        <a:effectLst/>
+                        <a:latin typeface="Times New Roman" panose="02020603050405020304" pitchFamily="18" charset="0"/>
+                        <a:ea typeface="Times New Roman" panose="02020603050405020304" pitchFamily="18" charset="0"/>
+                      </a:endParaRPr>
+                    </a:p>
+                  </a:txBody>
+                  <a:tcPr marL="76200" marR="76200" marT="50800" marB="50800" anchor="ctr"/>
+                </a:tc>
+                <a:extLst>
+                  <a:ext uri="{0D108BD9-81ED-4DB2-BD59-A6C34878D82A}">
+                    <a16:rowId xmlns:a16="http://schemas.microsoft.com/office/drawing/2014/main" val="1921129723"/>
+                  </a:ext>
+                </a:extLst>
+              </a:tr>
+              <a:tr h="0">
+                <a:tc>
+                  <a:txBody>
+                    <a:bodyPr/>
+                    <a:lstStyle/>
+                    <a:p>
+                      <a:pPr marL="6350" marR="12065" indent="-6350" algn="just">
+                        <a:lnSpc>
+                          <a:spcPct val="115000"/>
+                        </a:lnSpc>
+                        <a:spcAft>
+                          <a:spcPts val="870"/>
+                        </a:spcAft>
+                        <a:buNone/>
+                      </a:pPr>
+                      <a:r>
+                        <a:rPr lang="en-US" sz="1050" kern="0">
+                          <a:effectLst/>
+                        </a:rPr>
+                        <a:t>Thành viên - MSSV</a:t>
+                      </a:r>
+                      <a:endParaRPr lang="en-US" sz="1200" kern="100">
+                        <a:solidFill>
+                          <a:srgbClr val="000000"/>
+                        </a:solidFill>
+                        <a:effectLst/>
+                        <a:latin typeface="Times New Roman" panose="02020603050405020304" pitchFamily="18" charset="0"/>
+                        <a:ea typeface="Times New Roman" panose="02020603050405020304" pitchFamily="18" charset="0"/>
+                      </a:endParaRPr>
+                    </a:p>
+                  </a:txBody>
+                  <a:tcPr marL="76200" marR="76200" marT="50800" marB="50800" anchor="ctr"/>
+                </a:tc>
+                <a:tc>
+                  <a:txBody>
+                    <a:bodyPr/>
+                    <a:lstStyle/>
+                    <a:p>
+                      <a:pPr marL="6350" marR="12065" indent="-6350" algn="just">
+                        <a:lnSpc>
+                          <a:spcPct val="115000"/>
+                        </a:lnSpc>
+                        <a:spcAft>
+                          <a:spcPts val="870"/>
+                        </a:spcAft>
+                        <a:buNone/>
+                      </a:pPr>
+                      <a:r>
+                        <a:rPr lang="en-US" sz="1050" kern="0">
+                          <a:effectLst/>
+                        </a:rPr>
+                        <a:t>Võ Nguyễn Duyên - 231A010722</a:t>
+                      </a:r>
+                      <a:endParaRPr lang="en-US" sz="1200" kern="100">
+                        <a:solidFill>
+                          <a:srgbClr val="000000"/>
+                        </a:solidFill>
+                        <a:effectLst/>
+                        <a:latin typeface="Times New Roman" panose="02020603050405020304" pitchFamily="18" charset="0"/>
+                        <a:ea typeface="Times New Roman" panose="02020603050405020304" pitchFamily="18" charset="0"/>
+                      </a:endParaRPr>
+                    </a:p>
+                  </a:txBody>
+                  <a:tcPr marL="76200" marR="76200" marT="50800" marB="50800" anchor="ctr"/>
+                </a:tc>
+                <a:extLst>
+                  <a:ext uri="{0D108BD9-81ED-4DB2-BD59-A6C34878D82A}">
+                    <a16:rowId xmlns:a16="http://schemas.microsoft.com/office/drawing/2014/main" val="3697736174"/>
+                  </a:ext>
+                </a:extLst>
+              </a:tr>
+              <a:tr h="0">
+                <a:tc>
+                  <a:txBody>
+                    <a:bodyPr/>
+                    <a:lstStyle/>
+                    <a:p>
+                      <a:pPr marL="6350" marR="12065" indent="-6350" algn="just">
+                        <a:lnSpc>
+                          <a:spcPct val="115000"/>
+                        </a:lnSpc>
+                        <a:spcAft>
+                          <a:spcPts val="870"/>
+                        </a:spcAft>
+                        <a:buNone/>
+                      </a:pPr>
+                      <a:r>
+                        <a:rPr lang="en-US" sz="1050" kern="0">
+                          <a:effectLst/>
+                        </a:rPr>
+                        <a:t>Link repo GitHub</a:t>
+                      </a:r>
+                      <a:endParaRPr lang="en-US" sz="1200" kern="100">
+                        <a:solidFill>
+                          <a:srgbClr val="000000"/>
+                        </a:solidFill>
+                        <a:effectLst/>
+                        <a:latin typeface="Times New Roman" panose="02020603050405020304" pitchFamily="18" charset="0"/>
+                        <a:ea typeface="Times New Roman" panose="02020603050405020304" pitchFamily="18" charset="0"/>
+                      </a:endParaRPr>
+                    </a:p>
+                  </a:txBody>
+                  <a:tcPr marL="76200" marR="76200" marT="50800" marB="50800" anchor="ctr"/>
+                </a:tc>
+                <a:tc>
+                  <a:txBody>
+                    <a:bodyPr/>
+                    <a:lstStyle/>
+                    <a:p>
+                      <a:pPr marL="6350" marR="12065" indent="-6350" algn="just">
+                        <a:lnSpc>
+                          <a:spcPct val="115000"/>
+                        </a:lnSpc>
+                        <a:spcAft>
+                          <a:spcPts val="870"/>
+                        </a:spcAft>
+                        <a:buNone/>
+                      </a:pPr>
+                      <a:r>
+                        <a:rPr lang="en-US" sz="1050" u="sng" kern="0">
+                          <a:effectLst/>
+                          <a:hlinkClick r:id="rId4"/>
+                        </a:rPr>
+                        <a:t>vonguyenduyen512-oss/231A010722-vo-nguyen-duyen-quan-ly-rui-ro-iot: Bao cao tieu luan cuoi ky - Quan ly rui ro bao mat cho he thong IoT quy mo nho</a:t>
+                      </a:r>
+                      <a:endParaRPr lang="en-US" sz="1200" kern="100">
+                        <a:solidFill>
+                          <a:srgbClr val="000000"/>
+                        </a:solidFill>
+                        <a:effectLst/>
+                        <a:latin typeface="Times New Roman" panose="02020603050405020304" pitchFamily="18" charset="0"/>
+                        <a:ea typeface="Times New Roman" panose="02020603050405020304" pitchFamily="18" charset="0"/>
+                      </a:endParaRPr>
+                    </a:p>
+                  </a:txBody>
+                  <a:tcPr marL="76200" marR="76200" marT="50800" marB="50800" anchor="ctr"/>
+                </a:tc>
+                <a:extLst>
+                  <a:ext uri="{0D108BD9-81ED-4DB2-BD59-A6C34878D82A}">
+                    <a16:rowId xmlns:a16="http://schemas.microsoft.com/office/drawing/2014/main" val="1413273708"/>
+                  </a:ext>
+                </a:extLst>
+              </a:tr>
+              <a:tr h="0">
+                <a:tc>
+                  <a:txBody>
+                    <a:bodyPr/>
+                    <a:lstStyle/>
+                    <a:p>
+                      <a:pPr marL="6350" marR="12065" indent="-6350" algn="just">
+                        <a:lnSpc>
+                          <a:spcPct val="115000"/>
+                        </a:lnSpc>
+                        <a:spcAft>
+                          <a:spcPts val="870"/>
+                        </a:spcAft>
+                        <a:buNone/>
+                      </a:pPr>
+                      <a:r>
+                        <a:rPr lang="en-US" sz="1050" kern="0" dirty="0" err="1">
+                          <a:effectLst/>
+                        </a:rPr>
+                        <a:t>Ngày</a:t>
+                      </a:r>
+                      <a:r>
+                        <a:rPr lang="en-US" sz="1050" kern="0" dirty="0">
+                          <a:effectLst/>
+                        </a:rPr>
+                        <a:t> </a:t>
+                      </a:r>
+                      <a:r>
+                        <a:rPr lang="en-US" sz="1050" kern="0" dirty="0" err="1">
+                          <a:effectLst/>
+                        </a:rPr>
+                        <a:t>nộp</a:t>
+                      </a:r>
+                      <a:endParaRPr lang="en-US" sz="1200" kern="100" dirty="0">
+                        <a:solidFill>
+                          <a:srgbClr val="000000"/>
+                        </a:solidFill>
+                        <a:effectLst/>
+                        <a:latin typeface="Times New Roman" panose="02020603050405020304" pitchFamily="18" charset="0"/>
+                        <a:ea typeface="Times New Roman" panose="02020603050405020304" pitchFamily="18" charset="0"/>
+                      </a:endParaRPr>
+                    </a:p>
+                  </a:txBody>
+                  <a:tcPr marL="76200" marR="76200" marT="50800" marB="50800" anchor="ctr"/>
+                </a:tc>
+                <a:tc>
+                  <a:txBody>
+                    <a:bodyPr/>
+                    <a:lstStyle/>
+                    <a:p>
+                      <a:pPr marL="6350" marR="12065" indent="-6350" algn="just">
+                        <a:lnSpc>
+                          <a:spcPct val="115000"/>
+                        </a:lnSpc>
+                        <a:spcAft>
+                          <a:spcPts val="870"/>
+                        </a:spcAft>
+                        <a:buNone/>
+                      </a:pPr>
+                      <a:r>
+                        <a:rPr lang="en-US" sz="1050" kern="0" dirty="0">
+                          <a:effectLst/>
+                        </a:rPr>
+                        <a:t>24/07/2026</a:t>
+                      </a:r>
+                      <a:endParaRPr lang="en-US" sz="1200" kern="100" dirty="0">
+                        <a:solidFill>
+                          <a:srgbClr val="000000"/>
+                        </a:solidFill>
+                        <a:effectLst/>
+                        <a:latin typeface="Times New Roman" panose="02020603050405020304" pitchFamily="18" charset="0"/>
+                        <a:ea typeface="Times New Roman" panose="02020603050405020304" pitchFamily="18" charset="0"/>
+                      </a:endParaRPr>
+                    </a:p>
+                  </a:txBody>
+                  <a:tcPr marL="76200" marR="76200" marT="50800" marB="50800" anchor="ctr"/>
+                </a:tc>
+                <a:extLst>
+                  <a:ext uri="{0D108BD9-81ED-4DB2-BD59-A6C34878D82A}">
+                    <a16:rowId xmlns:a16="http://schemas.microsoft.com/office/drawing/2014/main" val="3859736371"/>
+                  </a:ext>
+                </a:extLst>
+              </a:tr>
+            </a:tbl>
+          </a:graphicData>
+        </a:graphic>
+      </p:graphicFrame>
     </p:spTree>
     <p:extLst>
       <p:ext uri="{BB962C8B-B14F-4D97-AF65-F5344CB8AC3E}">
